--- a/4293 Python26/Daniel's Labs/final_project/Final_project_python.pptx
+++ b/4293 Python26/Daniel's Labs/final_project/Final_project_python.pptx
@@ -5,7 +5,7 @@
     <p:sldMasterId id="2147483673" r:id="rId1"/>
   </p:sldMasterIdLst>
   <p:notesMasterIdLst>
-    <p:notesMasterId r:id="rId10"/>
+    <p:notesMasterId r:id="rId12"/>
   </p:notesMasterIdLst>
   <p:sldIdLst>
     <p:sldId id="256" r:id="rId2"/>
@@ -14,41 +14,43 @@
     <p:sldId id="257" r:id="rId5"/>
     <p:sldId id="318" r:id="rId6"/>
     <p:sldId id="319" r:id="rId7"/>
-    <p:sldId id="314" r:id="rId8"/>
-    <p:sldId id="270" r:id="rId9"/>
+    <p:sldId id="320" r:id="rId8"/>
+    <p:sldId id="321" r:id="rId9"/>
+    <p:sldId id="314" r:id="rId10"/>
+    <p:sldId id="270" r:id="rId11"/>
   </p:sldIdLst>
   <p:sldSz cx="9144000" cy="5143500" type="screen16x9"/>
   <p:notesSz cx="6858000" cy="9144000"/>
   <p:embeddedFontLst>
     <p:embeddedFont>
       <p:font typeface="Cambria Math" panose="02040503050406030204" pitchFamily="18" charset="0"/>
-      <p:regular r:id="rId11"/>
+      <p:regular r:id="rId13"/>
     </p:embeddedFont>
     <p:embeddedFont>
       <p:font typeface="Inter Medium" panose="020B0604020202020204" charset="0"/>
-      <p:regular r:id="rId12"/>
-      <p:bold r:id="rId13"/>
-      <p:italic r:id="rId14"/>
-      <p:boldItalic r:id="rId15"/>
+      <p:regular r:id="rId14"/>
+      <p:bold r:id="rId15"/>
+      <p:italic r:id="rId16"/>
+      <p:boldItalic r:id="rId17"/>
     </p:embeddedFont>
     <p:embeddedFont>
       <p:font typeface="Nunito Light" pitchFamily="2" charset="0"/>
-      <p:regular r:id="rId16"/>
-      <p:italic r:id="rId17"/>
+      <p:regular r:id="rId18"/>
+      <p:italic r:id="rId19"/>
     </p:embeddedFont>
     <p:embeddedFont>
       <p:font typeface="Open Sans" panose="020B0606030504020204" pitchFamily="34" charset="0"/>
-      <p:regular r:id="rId18"/>
-      <p:bold r:id="rId19"/>
-      <p:italic r:id="rId20"/>
-      <p:boldItalic r:id="rId21"/>
+      <p:regular r:id="rId20"/>
+      <p:bold r:id="rId21"/>
+      <p:italic r:id="rId22"/>
+      <p:boldItalic r:id="rId23"/>
     </p:embeddedFont>
     <p:embeddedFont>
       <p:font typeface="Roboto" panose="02000000000000000000" pitchFamily="2" charset="0"/>
-      <p:regular r:id="rId22"/>
-      <p:bold r:id="rId23"/>
-      <p:italic r:id="rId24"/>
-      <p:boldItalic r:id="rId25"/>
+      <p:regular r:id="rId24"/>
+      <p:bold r:id="rId25"/>
+      <p:italic r:id="rId26"/>
+      <p:boldItalic r:id="rId27"/>
     </p:embeddedFont>
   </p:embeddedFontLst>
   <p:defaultTextStyle>
@@ -280,6 +282,11 @@
       </a:defRPr>
     </a:lvl9pPr>
   </p:defaultTextStyle>
+  <p:extLst>
+    <p:ext uri="{EFAFB233-063F-42B5-8137-9DF3F51BA10A}">
+      <p15:sldGuideLst xmlns:p15="http://schemas.microsoft.com/office/powerpoint/2012/main"/>
+    </p:ext>
+  </p:extLst>
 </p:presentation>
 </file>
 
@@ -842,6 +849,117 @@
 </p:notes>
 </file>
 
+<file path=ppt/notesSlides/notesSlide10.xml><?xml version="1.0" encoding="utf-8"?>
+<p:notes xmlns:a="http://schemas.openxmlformats.org/drawingml/2006/main" xmlns:r="http://schemas.openxmlformats.org/officeDocument/2006/relationships" xmlns:p="http://schemas.openxmlformats.org/presentationml/2006/main" showMasterSp="0" showMasterPhAnim="0">
+  <p:cSld>
+    <p:spTree>
+      <p:nvGrpSpPr>
+        <p:cNvPr id="1" name="Shape 350"/>
+        <p:cNvGrpSpPr/>
+        <p:nvPr/>
+      </p:nvGrpSpPr>
+      <p:grpSpPr>
+        <a:xfrm>
+          <a:off x="0" y="0"/>
+          <a:ext cx="0" cy="0"/>
+          <a:chOff x="0" y="0"/>
+          <a:chExt cx="0" cy="0"/>
+        </a:xfrm>
+      </p:grpSpPr>
+      <p:sp>
+        <p:nvSpPr>
+          <p:cNvPr id="351" name="Google Shape;351;g135e18421cc_13_10:notes"/>
+          <p:cNvSpPr>
+            <a:spLocks noGrp="1" noRot="1" noChangeAspect="1"/>
+          </p:cNvSpPr>
+          <p:nvPr>
+            <p:ph type="sldImg" idx="2"/>
+          </p:nvPr>
+        </p:nvSpPr>
+        <p:spPr>
+          <a:xfrm>
+            <a:off x="381000" y="685800"/>
+            <a:ext cx="6096000" cy="3429000"/>
+          </a:xfrm>
+          <a:custGeom>
+            <a:avLst/>
+            <a:gdLst/>
+            <a:ahLst/>
+            <a:cxnLst/>
+            <a:rect l="l" t="t" r="r" b="b"/>
+            <a:pathLst>
+              <a:path w="120000" h="120000" extrusionOk="0">
+                <a:moveTo>
+                  <a:pt x="0" y="0"/>
+                </a:moveTo>
+                <a:lnTo>
+                  <a:pt x="120000" y="0"/>
+                </a:lnTo>
+                <a:lnTo>
+                  <a:pt x="120000" y="120000"/>
+                </a:lnTo>
+                <a:lnTo>
+                  <a:pt x="0" y="120000"/>
+                </a:lnTo>
+                <a:close/>
+              </a:path>
+            </a:pathLst>
+          </a:custGeom>
+        </p:spPr>
+        <p:txBody>
+          <a:bodyPr/>
+          <a:lstStyle/>
+          <a:p>
+            <a:endParaRPr lang="en-US"/>
+          </a:p>
+        </p:txBody>
+      </p:sp>
+      <p:sp>
+        <p:nvSpPr>
+          <p:cNvPr id="352" name="Google Shape;352;g135e18421cc_13_10:notes"/>
+          <p:cNvSpPr txBox="1">
+            <a:spLocks noGrp="1"/>
+          </p:cNvSpPr>
+          <p:nvPr>
+            <p:ph type="body" idx="1"/>
+          </p:nvPr>
+        </p:nvSpPr>
+        <p:spPr>
+          <a:xfrm>
+            <a:off x="685800" y="4343400"/>
+            <a:ext cx="5486400" cy="4114800"/>
+          </a:xfrm>
+          <a:prstGeom prst="rect">
+            <a:avLst/>
+          </a:prstGeom>
+        </p:spPr>
+        <p:txBody>
+          <a:bodyPr spcFirstLastPara="1" wrap="square" lIns="91425" tIns="91425" rIns="91425" bIns="91425" anchor="t" anchorCtr="0">
+            <a:noAutofit/>
+          </a:bodyPr>
+          <a:lstStyle/>
+          <a:p>
+            <a:pPr marL="0" lvl="0" indent="0" algn="l" rtl="0">
+              <a:spcBef>
+                <a:spcPts val="0"/>
+              </a:spcBef>
+              <a:spcAft>
+                <a:spcPts val="0"/>
+              </a:spcAft>
+              <a:buNone/>
+            </a:pPr>
+            <a:endParaRPr/>
+          </a:p>
+        </p:txBody>
+      </p:sp>
+    </p:spTree>
+  </p:cSld>
+  <p:clrMapOvr>
+    <a:masterClrMapping/>
+  </p:clrMapOvr>
+</p:notes>
+</file>
+
 <file path=ppt/notesSlides/notesSlide2.xml><?xml version="1.0" encoding="utf-8"?>
 <p:notes xmlns:a="http://schemas.openxmlformats.org/drawingml/2006/main" xmlns:r="http://schemas.openxmlformats.org/officeDocument/2006/relationships" xmlns:p="http://schemas.openxmlformats.org/presentationml/2006/main" showMasterSp="0" showMasterPhAnim="0">
   <p:cSld>
@@ -1156,8 +1274,8 @@
           </a:p>
         </p:txBody>
       </p:sp>
-      <mc:AlternateContent xmlns:mc="http://schemas.openxmlformats.org/markup-compatibility/2006">
-        <mc:Choice xmlns:a14="http://schemas.microsoft.com/office/drawing/2010/main" Requires="a14">
+      <mc:AlternateContent xmlns:mc="http://schemas.openxmlformats.org/markup-compatibility/2006" xmlns:a14="http://schemas.microsoft.com/office/drawing/2010/main">
+        <mc:Choice Requires="a14">
           <p:sp>
             <p:nvSpPr>
               <p:cNvPr id="144" name="Google Shape;144;gd431007ba2_0_208:notes"/>
@@ -1527,7 +1645,7 @@
             </p:txBody>
           </p:sp>
         </mc:Choice>
-        <mc:Fallback>
+        <mc:Fallback xmlns="">
           <p:sp>
             <p:nvSpPr>
               <p:cNvPr id="144" name="Google Shape;144;gd431007ba2_0_208:notes"/>
@@ -2511,6 +2629,234 @@
 </file>
 
 <file path=ppt/notesSlides/notesSlide7.xml><?xml version="1.0" encoding="utf-8"?>
+<p:notes xmlns:a="http://schemas.openxmlformats.org/drawingml/2006/main" xmlns:r="http://schemas.openxmlformats.org/officeDocument/2006/relationships" xmlns:p="http://schemas.openxmlformats.org/presentationml/2006/main" showMasterSp="0" showMasterPhAnim="0">
+  <p:cSld>
+    <p:spTree>
+      <p:nvGrpSpPr>
+        <p:cNvPr id="1" name="Shape 184">
+          <a:extLst>
+            <a:ext uri="{FF2B5EF4-FFF2-40B4-BE49-F238E27FC236}">
+              <a16:creationId xmlns:a16="http://schemas.microsoft.com/office/drawing/2014/main" id="{CF5FC2EF-A7B1-1377-819D-C3AD641753F2}"/>
+            </a:ext>
+          </a:extLst>
+        </p:cNvPr>
+        <p:cNvGrpSpPr/>
+        <p:nvPr/>
+      </p:nvGrpSpPr>
+      <p:grpSpPr>
+        <a:xfrm>
+          <a:off x="0" y="0"/>
+          <a:ext cx="0" cy="0"/>
+          <a:chOff x="0" y="0"/>
+          <a:chExt cx="0" cy="0"/>
+        </a:xfrm>
+      </p:grpSpPr>
+      <p:sp>
+        <p:nvSpPr>
+          <p:cNvPr id="185" name="Google Shape;185;g347e906a12e_0_14008:notes">
+            <a:extLst>
+              <a:ext uri="{FF2B5EF4-FFF2-40B4-BE49-F238E27FC236}">
+                <a16:creationId xmlns:a16="http://schemas.microsoft.com/office/drawing/2014/main" id="{B777D5E6-FCAC-5BAA-147E-4B65BFA6B0D6}"/>
+              </a:ext>
+            </a:extLst>
+          </p:cNvPr>
+          <p:cNvSpPr>
+            <a:spLocks noGrp="1" noRot="1" noChangeAspect="1"/>
+          </p:cNvSpPr>
+          <p:nvPr>
+            <p:ph type="sldImg" idx="2"/>
+          </p:nvPr>
+        </p:nvSpPr>
+        <p:spPr>
+          <a:xfrm>
+            <a:off x="381000" y="685800"/>
+            <a:ext cx="6096000" cy="3429000"/>
+          </a:xfrm>
+          <a:custGeom>
+            <a:avLst/>
+            <a:gdLst/>
+            <a:ahLst/>
+            <a:cxnLst/>
+            <a:rect l="l" t="t" r="r" b="b"/>
+            <a:pathLst>
+              <a:path w="120000" h="120000" extrusionOk="0">
+                <a:moveTo>
+                  <a:pt x="0" y="0"/>
+                </a:moveTo>
+                <a:lnTo>
+                  <a:pt x="120000" y="0"/>
+                </a:lnTo>
+                <a:lnTo>
+                  <a:pt x="120000" y="120000"/>
+                </a:lnTo>
+                <a:lnTo>
+                  <a:pt x="0" y="120000"/>
+                </a:lnTo>
+                <a:close/>
+              </a:path>
+            </a:pathLst>
+          </a:custGeom>
+        </p:spPr>
+        <p:txBody>
+          <a:bodyPr/>
+          <a:lstStyle/>
+          <a:p>
+            <a:endParaRPr lang="en-US"/>
+          </a:p>
+        </p:txBody>
+      </p:sp>
+      <p:sp>
+        <p:nvSpPr>
+          <p:cNvPr id="186" name="Google Shape;186;g347e906a12e_0_14008:notes">
+            <a:extLst>
+              <a:ext uri="{FF2B5EF4-FFF2-40B4-BE49-F238E27FC236}">
+                <a16:creationId xmlns:a16="http://schemas.microsoft.com/office/drawing/2014/main" id="{49239A2A-0337-859A-354D-C82FB05304C9}"/>
+              </a:ext>
+            </a:extLst>
+          </p:cNvPr>
+          <p:cNvSpPr txBox="1">
+            <a:spLocks noGrp="1"/>
+          </p:cNvSpPr>
+          <p:nvPr>
+            <p:ph type="body" idx="1"/>
+          </p:nvPr>
+        </p:nvSpPr>
+        <p:spPr>
+          <a:xfrm>
+            <a:off x="685800" y="4343400"/>
+            <a:ext cx="5486400" cy="4114800"/>
+          </a:xfrm>
+          <a:prstGeom prst="rect">
+            <a:avLst/>
+          </a:prstGeom>
+        </p:spPr>
+        <p:txBody>
+          <a:bodyPr spcFirstLastPara="1" wrap="square" lIns="91425" tIns="91425" rIns="91425" bIns="91425" anchor="t" anchorCtr="0">
+            <a:noAutofit/>
+          </a:bodyPr>
+          <a:lstStyle/>
+          <a:p>
+            <a:pPr marL="0" lvl="0" indent="0" algn="l" rtl="0">
+              <a:spcBef>
+                <a:spcPts val="0"/>
+              </a:spcBef>
+              <a:spcAft>
+                <a:spcPts val="0"/>
+              </a:spcAft>
+              <a:buNone/>
+            </a:pPr>
+            <a:endParaRPr/>
+          </a:p>
+        </p:txBody>
+      </p:sp>
+    </p:spTree>
+    <p:extLst>
+      <p:ext uri="{BB962C8B-B14F-4D97-AF65-F5344CB8AC3E}">
+        <p14:creationId xmlns:p14="http://schemas.microsoft.com/office/powerpoint/2010/main" val="2560604900"/>
+      </p:ext>
+    </p:extLst>
+  </p:cSld>
+  <p:clrMapOvr>
+    <a:masterClrMapping/>
+  </p:clrMapOvr>
+</p:notes>
+</file>
+
+<file path=ppt/notesSlides/notesSlide8.xml><?xml version="1.0" encoding="utf-8"?>
+<p:notes xmlns:a="http://schemas.openxmlformats.org/drawingml/2006/main" xmlns:r="http://schemas.openxmlformats.org/officeDocument/2006/relationships" xmlns:p="http://schemas.openxmlformats.org/presentationml/2006/main">
+  <p:cSld>
+    <p:spTree>
+      <p:nvGrpSpPr>
+        <p:cNvPr id="1" name="">
+          <a:extLst>
+            <a:ext uri="{FF2B5EF4-FFF2-40B4-BE49-F238E27FC236}">
+              <a16:creationId xmlns:a16="http://schemas.microsoft.com/office/drawing/2014/main" id="{903D63CD-9FE1-DCE3-B11A-677E4AD9DC76}"/>
+            </a:ext>
+          </a:extLst>
+        </p:cNvPr>
+        <p:cNvGrpSpPr/>
+        <p:nvPr/>
+      </p:nvGrpSpPr>
+      <p:grpSpPr>
+        <a:xfrm>
+          <a:off x="0" y="0"/>
+          <a:ext cx="0" cy="0"/>
+          <a:chOff x="0" y="0"/>
+          <a:chExt cx="0" cy="0"/>
+        </a:xfrm>
+      </p:grpSpPr>
+      <p:sp>
+        <p:nvSpPr>
+          <p:cNvPr id="2" name="Slide Image Placeholder 1">
+            <a:extLst>
+              <a:ext uri="{FF2B5EF4-FFF2-40B4-BE49-F238E27FC236}">
+                <a16:creationId xmlns:a16="http://schemas.microsoft.com/office/drawing/2014/main" id="{7E1D5CBA-288C-7562-AA0B-759331071CBA}"/>
+              </a:ext>
+            </a:extLst>
+          </p:cNvPr>
+          <p:cNvSpPr>
+            <a:spLocks noGrp="1" noRot="1" noChangeAspect="1"/>
+          </p:cNvSpPr>
+          <p:nvPr>
+            <p:ph type="sldImg"/>
+          </p:nvPr>
+        </p:nvSpPr>
+        <p:spPr>
+          <a:xfrm>
+            <a:off x="381000" y="685800"/>
+            <a:ext cx="6096000" cy="3429000"/>
+          </a:xfrm>
+        </p:spPr>
+        <p:txBody>
+          <a:bodyPr/>
+          <a:lstStyle/>
+          <a:p>
+            <a:endParaRPr lang="en-US"/>
+          </a:p>
+        </p:txBody>
+      </p:sp>
+      <p:sp>
+        <p:nvSpPr>
+          <p:cNvPr id="3" name="Notes Placeholder 2">
+            <a:extLst>
+              <a:ext uri="{FF2B5EF4-FFF2-40B4-BE49-F238E27FC236}">
+                <a16:creationId xmlns:a16="http://schemas.microsoft.com/office/drawing/2014/main" id="{1567484C-52CB-73C2-BAFE-A42C7EEAA3F1}"/>
+              </a:ext>
+            </a:extLst>
+          </p:cNvPr>
+          <p:cNvSpPr>
+            <a:spLocks noGrp="1"/>
+          </p:cNvSpPr>
+          <p:nvPr>
+            <p:ph type="body" idx="1"/>
+          </p:nvPr>
+        </p:nvSpPr>
+        <p:spPr/>
+        <p:txBody>
+          <a:bodyPr/>
+          <a:lstStyle/>
+          <a:p>
+            <a:pPr marL="158750" indent="0">
+              <a:buNone/>
+            </a:pPr>
+            <a:endParaRPr lang="en-US"/>
+          </a:p>
+        </p:txBody>
+      </p:sp>
+    </p:spTree>
+    <p:extLst>
+      <p:ext uri="{BB962C8B-B14F-4D97-AF65-F5344CB8AC3E}">
+        <p14:creationId xmlns:p14="http://schemas.microsoft.com/office/powerpoint/2010/main" val="1098656505"/>
+      </p:ext>
+    </p:extLst>
+  </p:cSld>
+  <p:clrMapOvr>
+    <a:masterClrMapping/>
+  </p:clrMapOvr>
+</p:notes>
+</file>
+
+<file path=ppt/notesSlides/notesSlide9.xml><?xml version="1.0" encoding="utf-8"?>
 <p:notes xmlns:a="http://schemas.openxmlformats.org/drawingml/2006/main" xmlns:r="http://schemas.openxmlformats.org/officeDocument/2006/relationships" xmlns:p="http://schemas.openxmlformats.org/presentationml/2006/main">
   <p:cSld>
     <p:spTree>
@@ -2579,117 +2925,6 @@
         <p14:creationId xmlns:p14="http://schemas.microsoft.com/office/powerpoint/2010/main" val="1996545243"/>
       </p:ext>
     </p:extLst>
-  </p:cSld>
-  <p:clrMapOvr>
-    <a:masterClrMapping/>
-  </p:clrMapOvr>
-</p:notes>
-</file>
-
-<file path=ppt/notesSlides/notesSlide8.xml><?xml version="1.0" encoding="utf-8"?>
-<p:notes xmlns:a="http://schemas.openxmlformats.org/drawingml/2006/main" xmlns:r="http://schemas.openxmlformats.org/officeDocument/2006/relationships" xmlns:p="http://schemas.openxmlformats.org/presentationml/2006/main" showMasterSp="0" showMasterPhAnim="0">
-  <p:cSld>
-    <p:spTree>
-      <p:nvGrpSpPr>
-        <p:cNvPr id="1" name="Shape 350"/>
-        <p:cNvGrpSpPr/>
-        <p:nvPr/>
-      </p:nvGrpSpPr>
-      <p:grpSpPr>
-        <a:xfrm>
-          <a:off x="0" y="0"/>
-          <a:ext cx="0" cy="0"/>
-          <a:chOff x="0" y="0"/>
-          <a:chExt cx="0" cy="0"/>
-        </a:xfrm>
-      </p:grpSpPr>
-      <p:sp>
-        <p:nvSpPr>
-          <p:cNvPr id="351" name="Google Shape;351;g135e18421cc_13_10:notes"/>
-          <p:cNvSpPr>
-            <a:spLocks noGrp="1" noRot="1" noChangeAspect="1"/>
-          </p:cNvSpPr>
-          <p:nvPr>
-            <p:ph type="sldImg" idx="2"/>
-          </p:nvPr>
-        </p:nvSpPr>
-        <p:spPr>
-          <a:xfrm>
-            <a:off x="381000" y="685800"/>
-            <a:ext cx="6096000" cy="3429000"/>
-          </a:xfrm>
-          <a:custGeom>
-            <a:avLst/>
-            <a:gdLst/>
-            <a:ahLst/>
-            <a:cxnLst/>
-            <a:rect l="l" t="t" r="r" b="b"/>
-            <a:pathLst>
-              <a:path w="120000" h="120000" extrusionOk="0">
-                <a:moveTo>
-                  <a:pt x="0" y="0"/>
-                </a:moveTo>
-                <a:lnTo>
-                  <a:pt x="120000" y="0"/>
-                </a:lnTo>
-                <a:lnTo>
-                  <a:pt x="120000" y="120000"/>
-                </a:lnTo>
-                <a:lnTo>
-                  <a:pt x="0" y="120000"/>
-                </a:lnTo>
-                <a:close/>
-              </a:path>
-            </a:pathLst>
-          </a:custGeom>
-        </p:spPr>
-        <p:txBody>
-          <a:bodyPr/>
-          <a:lstStyle/>
-          <a:p>
-            <a:endParaRPr lang="en-US"/>
-          </a:p>
-        </p:txBody>
-      </p:sp>
-      <p:sp>
-        <p:nvSpPr>
-          <p:cNvPr id="352" name="Google Shape;352;g135e18421cc_13_10:notes"/>
-          <p:cNvSpPr txBox="1">
-            <a:spLocks noGrp="1"/>
-          </p:cNvSpPr>
-          <p:nvPr>
-            <p:ph type="body" idx="1"/>
-          </p:nvPr>
-        </p:nvSpPr>
-        <p:spPr>
-          <a:xfrm>
-            <a:off x="685800" y="4343400"/>
-            <a:ext cx="5486400" cy="4114800"/>
-          </a:xfrm>
-          <a:prstGeom prst="rect">
-            <a:avLst/>
-          </a:prstGeom>
-        </p:spPr>
-        <p:txBody>
-          <a:bodyPr spcFirstLastPara="1" wrap="square" lIns="91425" tIns="91425" rIns="91425" bIns="91425" anchor="t" anchorCtr="0">
-            <a:noAutofit/>
-          </a:bodyPr>
-          <a:lstStyle/>
-          <a:p>
-            <a:pPr marL="0" lvl="0" indent="0" algn="l" rtl="0">
-              <a:spcBef>
-                <a:spcPts val="0"/>
-              </a:spcBef>
-              <a:spcAft>
-                <a:spcPts val="0"/>
-              </a:spcAft>
-              <a:buNone/>
-            </a:pPr>
-            <a:endParaRPr/>
-          </a:p>
-        </p:txBody>
-      </p:sp>
-    </p:spTree>
   </p:cSld>
   <p:clrMapOvr>
     <a:masterClrMapping/>
@@ -8395,6 +8630,107 @@
 </p:sld>
 </file>
 
+<file path=ppt/slides/slide10.xml><?xml version="1.0" encoding="utf-8"?>
+<p:sld xmlns:a="http://schemas.openxmlformats.org/drawingml/2006/main" xmlns:r="http://schemas.openxmlformats.org/officeDocument/2006/relationships" xmlns:p="http://schemas.openxmlformats.org/presentationml/2006/main">
+  <p:cSld>
+    <p:spTree>
+      <p:nvGrpSpPr>
+        <p:cNvPr id="1" name="Shape 353"/>
+        <p:cNvGrpSpPr/>
+        <p:nvPr/>
+      </p:nvGrpSpPr>
+      <p:grpSpPr>
+        <a:xfrm>
+          <a:off x="0" y="0"/>
+          <a:ext cx="0" cy="0"/>
+          <a:chOff x="0" y="0"/>
+          <a:chExt cx="0" cy="0"/>
+        </a:xfrm>
+      </p:grpSpPr>
+      <p:sp>
+        <p:nvSpPr>
+          <p:cNvPr id="354" name="Google Shape;354;p42"/>
+          <p:cNvSpPr txBox="1">
+            <a:spLocks noGrp="1"/>
+          </p:cNvSpPr>
+          <p:nvPr>
+            <p:ph type="title"/>
+          </p:nvPr>
+        </p:nvSpPr>
+        <p:spPr>
+          <a:xfrm>
+            <a:off x="2680289" y="1865212"/>
+            <a:ext cx="3783421" cy="954300"/>
+          </a:xfrm>
+          <a:prstGeom prst="rect">
+            <a:avLst/>
+          </a:prstGeom>
+        </p:spPr>
+        <p:txBody>
+          <a:bodyPr spcFirstLastPara="1" wrap="square" lIns="91425" tIns="91425" rIns="91425" bIns="91425" anchor="b" anchorCtr="0">
+            <a:noAutofit/>
+          </a:bodyPr>
+          <a:lstStyle/>
+          <a:p>
+            <a:pPr marL="0" lvl="0" indent="0" algn="ctr" rtl="0">
+              <a:spcBef>
+                <a:spcPts val="0"/>
+              </a:spcBef>
+              <a:spcAft>
+                <a:spcPts val="0"/>
+              </a:spcAft>
+              <a:buNone/>
+            </a:pPr>
+            <a:r>
+              <a:rPr lang="en" dirty="0"/>
+              <a:t>Fin</a:t>
+            </a:r>
+            <a:endParaRPr dirty="0"/>
+          </a:p>
+        </p:txBody>
+      </p:sp>
+      <p:sp>
+        <p:nvSpPr>
+          <p:cNvPr id="2" name="TextBox 1">
+            <a:extLst>
+              <a:ext uri="{FF2B5EF4-FFF2-40B4-BE49-F238E27FC236}">
+                <a16:creationId xmlns:a16="http://schemas.microsoft.com/office/drawing/2014/main" id="{33DA18A4-8D60-ED0F-F3E5-32855C9A1260}"/>
+              </a:ext>
+            </a:extLst>
+          </p:cNvPr>
+          <p:cNvSpPr txBox="1"/>
+          <p:nvPr/>
+        </p:nvSpPr>
+        <p:spPr>
+          <a:xfrm>
+            <a:off x="554182" y="3139044"/>
+            <a:ext cx="3574473" cy="767938"/>
+          </a:xfrm>
+          <a:prstGeom prst="rect">
+            <a:avLst/>
+          </a:prstGeom>
+          <a:solidFill>
+            <a:schemeClr val="tx1"/>
+          </a:solidFill>
+        </p:spPr>
+        <p:txBody>
+          <a:bodyPr wrap="square" rtlCol="0">
+            <a:spAutoFit/>
+          </a:bodyPr>
+          <a:lstStyle/>
+          <a:p>
+            <a:endParaRPr lang="en-US"/>
+          </a:p>
+        </p:txBody>
+      </p:sp>
+    </p:spTree>
+  </p:cSld>
+  <p:clrMapOvr>
+    <a:masterClrMapping/>
+  </p:clrMapOvr>
+</p:sld>
+</file>
+
 <file path=ppt/slides/slide2.xml><?xml version="1.0" encoding="utf-8"?>
 <p:sld xmlns:a="http://schemas.openxmlformats.org/drawingml/2006/main" xmlns:r="http://schemas.openxmlformats.org/officeDocument/2006/relationships" xmlns:p="http://schemas.openxmlformats.org/presentationml/2006/main">
   <p:cSld>
@@ -8772,8 +9108,8 @@
           </a:p>
         </p:txBody>
       </p:sp>
-      <mc:AlternateContent xmlns:mc="http://schemas.openxmlformats.org/markup-compatibility/2006">
-        <mc:Choice xmlns:a14="http://schemas.microsoft.com/office/drawing/2010/main" Requires="a14">
+      <mc:AlternateContent xmlns:mc="http://schemas.openxmlformats.org/markup-compatibility/2006" xmlns:a14="http://schemas.microsoft.com/office/drawing/2010/main">
+        <mc:Choice Requires="a14">
           <p:graphicFrame>
             <p:nvGraphicFramePr>
               <p:cNvPr id="151" name="Google Shape;151;p29"/>
@@ -9524,7 +9860,7 @@
             </a:graphic>
           </p:graphicFrame>
         </mc:Choice>
-        <mc:Fallback>
+        <mc:Fallback xmlns="">
           <p:graphicFrame>
             <p:nvGraphicFramePr>
               <p:cNvPr id="151" name="Google Shape;151;p29"/>
@@ -11504,6 +11840,195 @@
 <file path=ppt/slides/slide7.xml><?xml version="1.0" encoding="utf-8"?>
 <p:sld xmlns:a="http://schemas.openxmlformats.org/drawingml/2006/main" xmlns:r="http://schemas.openxmlformats.org/officeDocument/2006/relationships" xmlns:p="http://schemas.openxmlformats.org/presentationml/2006/main">
   <p:cSld>
+    <p:bg>
+      <p:bgPr>
+        <a:solidFill>
+          <a:schemeClr val="lt1"/>
+        </a:solidFill>
+        <a:effectLst/>
+      </p:bgPr>
+    </p:bg>
+    <p:spTree>
+      <p:nvGrpSpPr>
+        <p:cNvPr id="1" name="Shape 187">
+          <a:extLst>
+            <a:ext uri="{FF2B5EF4-FFF2-40B4-BE49-F238E27FC236}">
+              <a16:creationId xmlns:a16="http://schemas.microsoft.com/office/drawing/2014/main" id="{8A2FC21E-6733-A7C8-2C6D-35BEED399B4A}"/>
+            </a:ext>
+          </a:extLst>
+        </p:cNvPr>
+        <p:cNvGrpSpPr/>
+        <p:nvPr/>
+      </p:nvGrpSpPr>
+      <p:grpSpPr>
+        <a:xfrm>
+          <a:off x="0" y="0"/>
+          <a:ext cx="0" cy="0"/>
+          <a:chOff x="0" y="0"/>
+          <a:chExt cx="0" cy="0"/>
+        </a:xfrm>
+      </p:grpSpPr>
+      <p:sp>
+        <p:nvSpPr>
+          <p:cNvPr id="191" name="Google Shape;191;p32">
+            <a:extLst>
+              <a:ext uri="{FF2B5EF4-FFF2-40B4-BE49-F238E27FC236}">
+                <a16:creationId xmlns:a16="http://schemas.microsoft.com/office/drawing/2014/main" id="{ED119104-B981-3A2E-4E8A-60815D18D543}"/>
+              </a:ext>
+            </a:extLst>
+          </p:cNvPr>
+          <p:cNvSpPr txBox="1">
+            <a:spLocks noGrp="1"/>
+          </p:cNvSpPr>
+          <p:nvPr>
+            <p:ph type="title"/>
+          </p:nvPr>
+        </p:nvSpPr>
+        <p:spPr>
+          <a:xfrm>
+            <a:off x="722375" y="1861301"/>
+            <a:ext cx="7699251" cy="1569900"/>
+          </a:xfrm>
+          <a:prstGeom prst="rect">
+            <a:avLst/>
+          </a:prstGeom>
+        </p:spPr>
+        <p:txBody>
+          <a:bodyPr spcFirstLastPara="1" wrap="square" lIns="91425" tIns="91425" rIns="91425" bIns="91425" anchor="t" anchorCtr="0">
+            <a:noAutofit/>
+          </a:bodyPr>
+          <a:lstStyle/>
+          <a:p>
+            <a:r>
+              <a:rPr lang="en-US" sz="4800" dirty="0"/>
+              <a:t>Program Structure</a:t>
+            </a:r>
+            <a:endParaRPr lang="en" dirty="0"/>
+          </a:p>
+        </p:txBody>
+      </p:sp>
+    </p:spTree>
+    <p:extLst>
+      <p:ext uri="{BB962C8B-B14F-4D97-AF65-F5344CB8AC3E}">
+        <p14:creationId xmlns:p14="http://schemas.microsoft.com/office/powerpoint/2010/main" val="1781886533"/>
+      </p:ext>
+    </p:extLst>
+  </p:cSld>
+  <p:clrMapOvr>
+    <a:masterClrMapping/>
+  </p:clrMapOvr>
+</p:sld>
+</file>
+
+<file path=ppt/slides/slide8.xml><?xml version="1.0" encoding="utf-8"?>
+<p:sld xmlns:a="http://schemas.openxmlformats.org/drawingml/2006/main" xmlns:r="http://schemas.openxmlformats.org/officeDocument/2006/relationships" xmlns:p="http://schemas.openxmlformats.org/presentationml/2006/main">
+  <p:cSld>
+    <p:spTree>
+      <p:nvGrpSpPr>
+        <p:cNvPr id="1" name="">
+          <a:extLst>
+            <a:ext uri="{FF2B5EF4-FFF2-40B4-BE49-F238E27FC236}">
+              <a16:creationId xmlns:a16="http://schemas.microsoft.com/office/drawing/2014/main" id="{2AF03A13-EA5D-9D77-B92C-7D74D2BC1903}"/>
+            </a:ext>
+          </a:extLst>
+        </p:cNvPr>
+        <p:cNvGrpSpPr/>
+        <p:nvPr/>
+      </p:nvGrpSpPr>
+      <p:grpSpPr>
+        <a:xfrm>
+          <a:off x="0" y="0"/>
+          <a:ext cx="0" cy="0"/>
+          <a:chOff x="0" y="0"/>
+          <a:chExt cx="0" cy="0"/>
+        </a:xfrm>
+      </p:grpSpPr>
+      <p:sp>
+        <p:nvSpPr>
+          <p:cNvPr id="2" name="Title 1">
+            <a:extLst>
+              <a:ext uri="{FF2B5EF4-FFF2-40B4-BE49-F238E27FC236}">
+                <a16:creationId xmlns:a16="http://schemas.microsoft.com/office/drawing/2014/main" id="{1C1A60C6-D9F1-99F7-ABFB-E5FCE8B98D6B}"/>
+              </a:ext>
+            </a:extLst>
+          </p:cNvPr>
+          <p:cNvSpPr>
+            <a:spLocks noGrp="1"/>
+          </p:cNvSpPr>
+          <p:nvPr>
+            <p:ph type="title"/>
+          </p:nvPr>
+        </p:nvSpPr>
+        <p:spPr>
+          <a:xfrm>
+            <a:off x="713225" y="445025"/>
+            <a:ext cx="7717500" cy="572700"/>
+          </a:xfrm>
+        </p:spPr>
+        <p:txBody>
+          <a:bodyPr wrap="square" anchor="ctr">
+            <a:normAutofit/>
+          </a:bodyPr>
+          <a:lstStyle/>
+          <a:p>
+            <a:pPr>
+              <a:lnSpc>
+                <a:spcPct val="90000"/>
+              </a:lnSpc>
+            </a:pPr>
+            <a:r>
+              <a:rPr lang="en-US" dirty="0"/>
+              <a:t>Input File</a:t>
+            </a:r>
+          </a:p>
+        </p:txBody>
+      </p:sp>
+      <p:pic>
+        <p:nvPicPr>
+          <p:cNvPr id="7" name="Picture 6">
+            <a:extLst>
+              <a:ext uri="{FF2B5EF4-FFF2-40B4-BE49-F238E27FC236}">
+                <a16:creationId xmlns:a16="http://schemas.microsoft.com/office/drawing/2014/main" id="{C89B21AE-9D18-F063-466B-B16D092A6941}"/>
+              </a:ext>
+            </a:extLst>
+          </p:cNvPr>
+          <p:cNvPicPr>
+            <a:picLocks noChangeAspect="1"/>
+          </p:cNvPicPr>
+          <p:nvPr/>
+        </p:nvPicPr>
+        <p:blipFill>
+          <a:blip r:embed="rId3"/>
+          <a:stretch>
+            <a:fillRect/>
+          </a:stretch>
+        </p:blipFill>
+        <p:spPr>
+          <a:xfrm>
+            <a:off x="2921853" y="793399"/>
+            <a:ext cx="3300243" cy="3854742"/>
+          </a:xfrm>
+          <a:prstGeom prst="rect">
+            <a:avLst/>
+          </a:prstGeom>
+        </p:spPr>
+      </p:pic>
+    </p:spTree>
+    <p:extLst>
+      <p:ext uri="{BB962C8B-B14F-4D97-AF65-F5344CB8AC3E}">
+        <p14:creationId xmlns:p14="http://schemas.microsoft.com/office/powerpoint/2010/main" val="2540285136"/>
+      </p:ext>
+    </p:extLst>
+  </p:cSld>
+  <p:clrMapOvr>
+    <a:masterClrMapping/>
+  </p:clrMapOvr>
+</p:sld>
+</file>
+
+<file path=ppt/slides/slide9.xml><?xml version="1.0" encoding="utf-8"?>
+<p:sld xmlns:a="http://schemas.openxmlformats.org/drawingml/2006/main" xmlns:r="http://schemas.openxmlformats.org/officeDocument/2006/relationships" xmlns:p="http://schemas.openxmlformats.org/presentationml/2006/main">
+  <p:cSld>
     <p:spTree>
       <p:nvGrpSpPr>
         <p:cNvPr id="1" name=""/>
@@ -11599,107 +12124,6 @@
         <p14:creationId xmlns:p14="http://schemas.microsoft.com/office/powerpoint/2010/main" val="1753111505"/>
       </p:ext>
     </p:extLst>
-  </p:cSld>
-  <p:clrMapOvr>
-    <a:masterClrMapping/>
-  </p:clrMapOvr>
-</p:sld>
-</file>
-
-<file path=ppt/slides/slide8.xml><?xml version="1.0" encoding="utf-8"?>
-<p:sld xmlns:a="http://schemas.openxmlformats.org/drawingml/2006/main" xmlns:r="http://schemas.openxmlformats.org/officeDocument/2006/relationships" xmlns:p="http://schemas.openxmlformats.org/presentationml/2006/main">
-  <p:cSld>
-    <p:spTree>
-      <p:nvGrpSpPr>
-        <p:cNvPr id="1" name="Shape 353"/>
-        <p:cNvGrpSpPr/>
-        <p:nvPr/>
-      </p:nvGrpSpPr>
-      <p:grpSpPr>
-        <a:xfrm>
-          <a:off x="0" y="0"/>
-          <a:ext cx="0" cy="0"/>
-          <a:chOff x="0" y="0"/>
-          <a:chExt cx="0" cy="0"/>
-        </a:xfrm>
-      </p:grpSpPr>
-      <p:sp>
-        <p:nvSpPr>
-          <p:cNvPr id="354" name="Google Shape;354;p42"/>
-          <p:cNvSpPr txBox="1">
-            <a:spLocks noGrp="1"/>
-          </p:cNvSpPr>
-          <p:nvPr>
-            <p:ph type="title"/>
-          </p:nvPr>
-        </p:nvSpPr>
-        <p:spPr>
-          <a:xfrm>
-            <a:off x="2680289" y="1865212"/>
-            <a:ext cx="3783421" cy="954300"/>
-          </a:xfrm>
-          <a:prstGeom prst="rect">
-            <a:avLst/>
-          </a:prstGeom>
-        </p:spPr>
-        <p:txBody>
-          <a:bodyPr spcFirstLastPara="1" wrap="square" lIns="91425" tIns="91425" rIns="91425" bIns="91425" anchor="b" anchorCtr="0">
-            <a:noAutofit/>
-          </a:bodyPr>
-          <a:lstStyle/>
-          <a:p>
-            <a:pPr marL="0" lvl="0" indent="0" algn="ctr" rtl="0">
-              <a:spcBef>
-                <a:spcPts val="0"/>
-              </a:spcBef>
-              <a:spcAft>
-                <a:spcPts val="0"/>
-              </a:spcAft>
-              <a:buNone/>
-            </a:pPr>
-            <a:r>
-              <a:rPr lang="en" dirty="0"/>
-              <a:t>Fin</a:t>
-            </a:r>
-            <a:endParaRPr dirty="0"/>
-          </a:p>
-        </p:txBody>
-      </p:sp>
-      <p:sp>
-        <p:nvSpPr>
-          <p:cNvPr id="2" name="TextBox 1">
-            <a:extLst>
-              <a:ext uri="{FF2B5EF4-FFF2-40B4-BE49-F238E27FC236}">
-                <a16:creationId xmlns:a16="http://schemas.microsoft.com/office/drawing/2014/main" id="{33DA18A4-8D60-ED0F-F3E5-32855C9A1260}"/>
-              </a:ext>
-            </a:extLst>
-          </p:cNvPr>
-          <p:cNvSpPr txBox="1"/>
-          <p:nvPr/>
-        </p:nvSpPr>
-        <p:spPr>
-          <a:xfrm>
-            <a:off x="554182" y="3139044"/>
-            <a:ext cx="3574473" cy="767938"/>
-          </a:xfrm>
-          <a:prstGeom prst="rect">
-            <a:avLst/>
-          </a:prstGeom>
-          <a:solidFill>
-            <a:schemeClr val="tx1"/>
-          </a:solidFill>
-        </p:spPr>
-        <p:txBody>
-          <a:bodyPr wrap="square" rtlCol="0">
-            <a:spAutoFit/>
-          </a:bodyPr>
-          <a:lstStyle/>
-          <a:p>
-            <a:endParaRPr lang="en-US"/>
-          </a:p>
-        </p:txBody>
-      </p:sp>
-    </p:spTree>
   </p:cSld>
   <p:clrMapOvr>
     <a:masterClrMapping/>

--- a/4293 Python26/Daniel's Labs/final_project/Final_project_python.pptx
+++ b/4293 Python26/Daniel's Labs/final_project/Final_project_python.pptx
@@ -1396,7 +1396,7 @@
                 </a:r>
                 <a:r>
                   <a:rPr lang="en-US" dirty="0"/>
-                  <a:t> It sets the zero point for all phase angles in the system. All other bus angles (δ) are measured relative to the slack bus angle of 0°. This makes the 	math consistent.</a:t>
+                  <a:t> It sets the zero point for all phase angles in the system. All other bus angles (δ) are measured relative to the slack bus angle of 0°. This makes the math consistent.</a:t>
                 </a:r>
               </a:p>
               <a:p>
@@ -1612,7 +1612,7 @@
                 </a:r>
                 <a:r>
                   <a:rPr lang="en-US" dirty="0"/>
-                  <a:t> at the beginning (before the Newton-Raphson loop starts) from the branch data. It never changes during the 	iterations. It is used in every iteration to compute currents from voltages</a:t>
+                  <a:t> at the beginning (before the Newton-Raphson loop starts) from the branch data. It never changes during the iterations. It is used in every iteration to compute currents from voltages</a:t>
                 </a:r>
                 <a:endParaRPr lang="en-US" sz="1100" b="1" dirty="0">
                   <a:effectLst/>
